--- a/actors.pptx
+++ b/actors.pptx
@@ -4240,14 +4240,7 @@
                 <a:latin typeface="微软雅黑" panose="020B0503020204020204" pitchFamily="34" charset="-122"/>
                 <a:ea typeface="微软雅黑" panose="020B0503020204020204" pitchFamily="34" charset="-122"/>
               </a:rPr>
-              <a:t>孟学树</a:t>
-            </a:r>
-            <a:r>
-              <a:rPr lang="zh-CN" altLang="en-US" sz="1000" dirty="0" smtClean="0">
-                <a:latin typeface="微软雅黑" panose="020B0503020204020204" pitchFamily="34" charset="-122"/>
-                <a:ea typeface="微软雅黑" panose="020B0503020204020204" pitchFamily="34" charset="-122"/>
-              </a:rPr>
-              <a:t>博士</a:t>
+              <a:t>孟学树博士</a:t>
             </a:r>
             <a:r>
               <a:rPr lang="en-US" altLang="zh-CN" sz="1000" dirty="0" smtClean="0">
@@ -5448,21 +5441,7 @@
                 <a:latin typeface="微软雅黑" panose="020B0503020204020204" pitchFamily="34" charset="-122"/>
                 <a:ea typeface="微软雅黑" panose="020B0503020204020204" pitchFamily="34" charset="-122"/>
               </a:rPr>
-              <a:t>古</a:t>
-            </a:r>
-            <a:r>
-              <a:rPr lang="zh-CN" altLang="en-US" sz="1000" dirty="0" smtClean="0">
-                <a:latin typeface="微软雅黑" panose="020B0503020204020204" pitchFamily="34" charset="-122"/>
-                <a:ea typeface="微软雅黑" panose="020B0503020204020204" pitchFamily="34" charset="-122"/>
-              </a:rPr>
-              <a:t>小斌</a:t>
-            </a:r>
-            <a:r>
-              <a:rPr lang="zh-CN" altLang="en-US" sz="1000" dirty="0" smtClean="0">
-                <a:latin typeface="微软雅黑" panose="020B0503020204020204" pitchFamily="34" charset="-122"/>
-                <a:ea typeface="微软雅黑" panose="020B0503020204020204" pitchFamily="34" charset="-122"/>
-              </a:rPr>
-              <a:t>   </a:t>
+              <a:t>古小斌   </a:t>
             </a:r>
             <a:r>
               <a:rPr lang="en-US" altLang="zh-CN" sz="1000" dirty="0" smtClean="0">
@@ -5744,9 +5723,86 @@
           </a:p>
         </p:txBody>
       </p:sp>
+      <p:sp>
+        <p:nvSpPr>
+          <p:cNvPr id="33" name="矩形 32"/>
+          <p:cNvSpPr/>
+          <p:nvPr/>
+        </p:nvSpPr>
+        <p:spPr>
+          <a:xfrm>
+            <a:off x="3763936" y="5589264"/>
+            <a:ext cx="1548000" cy="216000"/>
+          </a:xfrm>
+          <a:prstGeom prst="rect">
+            <a:avLst/>
+          </a:prstGeom>
+          <a:ln w="12700"/>
+        </p:spPr>
+        <p:style>
+          <a:lnRef idx="2">
+            <a:schemeClr val="dk1"/>
+          </a:lnRef>
+          <a:fillRef idx="1">
+            <a:schemeClr val="lt1"/>
+          </a:fillRef>
+          <a:effectRef idx="0">
+            <a:schemeClr val="dk1"/>
+          </a:effectRef>
+          <a:fontRef idx="minor">
+            <a:schemeClr val="dk1"/>
+          </a:fontRef>
+        </p:style>
+        <p:txBody>
+          <a:bodyPr rtlCol="0" anchor="ctr"/>
+          <a:lstStyle/>
+          <a:p>
+            <a:pPr algn="ctr"/>
+            <a:r>
+              <a:rPr lang="zh-CN" altLang="en-US" sz="1000" dirty="0">
+                <a:latin typeface="微软雅黑" panose="020B0503020204020204" pitchFamily="34" charset="-122"/>
+                <a:ea typeface="微软雅黑" panose="020B0503020204020204" pitchFamily="34" charset="-122"/>
+              </a:rPr>
+              <a:t>张文乐</a:t>
+            </a:r>
+            <a:r>
+              <a:rPr lang="zh-CN" altLang="en-US" sz="1000" dirty="0" smtClean="0">
+                <a:latin typeface="微软雅黑" panose="020B0503020204020204" pitchFamily="34" charset="-122"/>
+                <a:ea typeface="微软雅黑" panose="020B0503020204020204" pitchFamily="34" charset="-122"/>
+              </a:rPr>
+              <a:t>   </a:t>
+            </a:r>
+            <a:r>
+              <a:rPr lang="en-US" altLang="zh-CN" sz="1000" dirty="0" smtClean="0">
+                <a:latin typeface="微软雅黑" panose="020B0503020204020204" pitchFamily="34" charset="-122"/>
+                <a:ea typeface="微软雅黑" panose="020B0503020204020204" pitchFamily="34" charset="-122"/>
+              </a:rPr>
+              <a:t>–</a:t>
+            </a:r>
+            <a:r>
+              <a:rPr lang="zh-CN" altLang="en-US" sz="1000" dirty="0">
+                <a:latin typeface="微软雅黑" panose="020B0503020204020204" pitchFamily="34" charset="-122"/>
+                <a:ea typeface="微软雅黑" panose="020B0503020204020204" pitchFamily="34" charset="-122"/>
+              </a:rPr>
+              <a:t>沈腾</a:t>
+            </a:r>
+            <a:r>
+              <a:rPr lang="zh-CN" altLang="en-US" sz="1000" dirty="0" smtClean="0">
+                <a:latin typeface="微软雅黑" panose="020B0503020204020204" pitchFamily="34" charset="-122"/>
+                <a:ea typeface="微软雅黑" panose="020B0503020204020204" pitchFamily="34" charset="-122"/>
+              </a:rPr>
+              <a:t>饰演</a:t>
+            </a:r>
+            <a:endParaRPr lang="zh-CN" altLang="en-US" sz="1000" dirty="0">
+              <a:latin typeface="微软雅黑" panose="020B0503020204020204" pitchFamily="34" charset="-122"/>
+              <a:ea typeface="微软雅黑" panose="020B0503020204020204" pitchFamily="34" charset="-122"/>
+            </a:endParaRPr>
+          </a:p>
+        </p:txBody>
+      </p:sp>
       <p:pic>
         <p:nvPicPr>
-          <p:cNvPr id="32" name="Picture 6"/>
+          <p:cNvPr id="34" name="Picture 9"/>
           <p:cNvPicPr>
             <a:picLocks noChangeAspect="1" noChangeArrowheads="1"/>
           </p:cNvPicPr>
@@ -5767,8 +5823,8 @@
         </p:blipFill>
         <p:spPr bwMode="auto">
           <a:xfrm>
-            <a:off x="4009588" y="4803635"/>
-            <a:ext cx="1056208" cy="755643"/>
+            <a:off x="3965823" y="5792814"/>
+            <a:ext cx="1144225" cy="820907"/>
           </a:xfrm>
           <a:prstGeom prst="rect">
             <a:avLst/>
@@ -5808,86 +5864,9 @@
           </a:extLst>
         </p:spPr>
       </p:pic>
-      <p:sp>
-        <p:nvSpPr>
-          <p:cNvPr id="33" name="矩形 32"/>
-          <p:cNvSpPr/>
-          <p:nvPr/>
-        </p:nvSpPr>
-        <p:spPr>
-          <a:xfrm>
-            <a:off x="3763936" y="5589264"/>
-            <a:ext cx="1548000" cy="216000"/>
-          </a:xfrm>
-          <a:prstGeom prst="rect">
-            <a:avLst/>
-          </a:prstGeom>
-          <a:ln w="12700"/>
-        </p:spPr>
-        <p:style>
-          <a:lnRef idx="2">
-            <a:schemeClr val="dk1"/>
-          </a:lnRef>
-          <a:fillRef idx="1">
-            <a:schemeClr val="lt1"/>
-          </a:fillRef>
-          <a:effectRef idx="0">
-            <a:schemeClr val="dk1"/>
-          </a:effectRef>
-          <a:fontRef idx="minor">
-            <a:schemeClr val="dk1"/>
-          </a:fontRef>
-        </p:style>
-        <p:txBody>
-          <a:bodyPr rtlCol="0" anchor="ctr"/>
-          <a:lstStyle/>
-          <a:p>
-            <a:pPr algn="ctr"/>
-            <a:r>
-              <a:rPr lang="zh-CN" altLang="en-US" sz="1000" dirty="0">
-                <a:latin typeface="微软雅黑" panose="020B0503020204020204" pitchFamily="34" charset="-122"/>
-                <a:ea typeface="微软雅黑" panose="020B0503020204020204" pitchFamily="34" charset="-122"/>
-              </a:rPr>
-              <a:t>张文乐</a:t>
-            </a:r>
-            <a:r>
-              <a:rPr lang="zh-CN" altLang="en-US" sz="1000" dirty="0" smtClean="0">
-                <a:latin typeface="微软雅黑" panose="020B0503020204020204" pitchFamily="34" charset="-122"/>
-                <a:ea typeface="微软雅黑" panose="020B0503020204020204" pitchFamily="34" charset="-122"/>
-              </a:rPr>
-              <a:t>   </a:t>
-            </a:r>
-            <a:r>
-              <a:rPr lang="en-US" altLang="zh-CN" sz="1000" dirty="0" smtClean="0">
-                <a:latin typeface="微软雅黑" panose="020B0503020204020204" pitchFamily="34" charset="-122"/>
-                <a:ea typeface="微软雅黑" panose="020B0503020204020204" pitchFamily="34" charset="-122"/>
-              </a:rPr>
-              <a:t>–</a:t>
-            </a:r>
-            <a:r>
-              <a:rPr lang="zh-CN" altLang="en-US" sz="1000" dirty="0">
-                <a:latin typeface="微软雅黑" panose="020B0503020204020204" pitchFamily="34" charset="-122"/>
-                <a:ea typeface="微软雅黑" panose="020B0503020204020204" pitchFamily="34" charset="-122"/>
-              </a:rPr>
-              <a:t>沈腾</a:t>
-            </a:r>
-            <a:r>
-              <a:rPr lang="zh-CN" altLang="en-US" sz="1000" dirty="0" smtClean="0">
-                <a:latin typeface="微软雅黑" panose="020B0503020204020204" pitchFamily="34" charset="-122"/>
-                <a:ea typeface="微软雅黑" panose="020B0503020204020204" pitchFamily="34" charset="-122"/>
-              </a:rPr>
-              <a:t>饰演</a:t>
-            </a:r>
-            <a:endParaRPr lang="zh-CN" altLang="en-US" sz="1000" dirty="0">
-              <a:latin typeface="微软雅黑" panose="020B0503020204020204" pitchFamily="34" charset="-122"/>
-              <a:ea typeface="微软雅黑" panose="020B0503020204020204" pitchFamily="34" charset="-122"/>
-            </a:endParaRPr>
-          </a:p>
-        </p:txBody>
-      </p:sp>
       <p:pic>
         <p:nvPicPr>
-          <p:cNvPr id="34" name="Picture 9"/>
+          <p:cNvPr id="35" name="Picture 3"/>
           <p:cNvPicPr>
             <a:picLocks noChangeAspect="1" noChangeArrowheads="1"/>
           </p:cNvPicPr>
@@ -5908,8 +5887,8 @@
         </p:blipFill>
         <p:spPr bwMode="auto">
           <a:xfrm>
-            <a:off x="3965823" y="5792814"/>
-            <a:ext cx="1144225" cy="820907"/>
+            <a:off x="4255200" y="1703438"/>
+            <a:ext cx="565471" cy="848205"/>
           </a:xfrm>
           <a:prstGeom prst="rect">
             <a:avLst/>
@@ -5949,9 +5928,152 @@
           </a:extLst>
         </p:spPr>
       </p:pic>
+      <p:sp>
+        <p:nvSpPr>
+          <p:cNvPr id="37" name="矩形 36"/>
+          <p:cNvSpPr/>
+          <p:nvPr/>
+        </p:nvSpPr>
+        <p:spPr>
+          <a:xfrm>
+            <a:off x="5577907" y="1477450"/>
+            <a:ext cx="1548000" cy="216000"/>
+          </a:xfrm>
+          <a:prstGeom prst="rect">
+            <a:avLst/>
+          </a:prstGeom>
+          <a:ln w="12700"/>
+        </p:spPr>
+        <p:style>
+          <a:lnRef idx="2">
+            <a:schemeClr val="dk1"/>
+          </a:lnRef>
+          <a:fillRef idx="1">
+            <a:schemeClr val="lt1"/>
+          </a:fillRef>
+          <a:effectRef idx="0">
+            <a:schemeClr val="dk1"/>
+          </a:effectRef>
+          <a:fontRef idx="minor">
+            <a:schemeClr val="dk1"/>
+          </a:fontRef>
+        </p:style>
+        <p:txBody>
+          <a:bodyPr rtlCol="0" anchor="ctr"/>
+          <a:lstStyle/>
+          <a:p>
+            <a:pPr algn="ctr"/>
+            <a:r>
+              <a:rPr lang="zh-CN" altLang="en-US" sz="1000" dirty="0">
+                <a:latin typeface="微软雅黑" panose="020B0503020204020204" pitchFamily="34" charset="-122"/>
+                <a:ea typeface="微软雅黑" panose="020B0503020204020204" pitchFamily="34" charset="-122"/>
+              </a:rPr>
+              <a:t>王一鸣</a:t>
+            </a:r>
+            <a:r>
+              <a:rPr lang="zh-CN" altLang="en-US" sz="1000" dirty="0" smtClean="0">
+                <a:latin typeface="微软雅黑" panose="020B0503020204020204" pitchFamily="34" charset="-122"/>
+                <a:ea typeface="微软雅黑" panose="020B0503020204020204" pitchFamily="34" charset="-122"/>
+              </a:rPr>
+              <a:t>   </a:t>
+            </a:r>
+            <a:r>
+              <a:rPr lang="en-US" altLang="zh-CN" sz="1000" dirty="0" smtClean="0">
+                <a:latin typeface="微软雅黑" panose="020B0503020204020204" pitchFamily="34" charset="-122"/>
+                <a:ea typeface="微软雅黑" panose="020B0503020204020204" pitchFamily="34" charset="-122"/>
+              </a:rPr>
+              <a:t>–</a:t>
+            </a:r>
+            <a:r>
+              <a:rPr lang="zh-CN" altLang="en-US" sz="1000" dirty="0">
+                <a:latin typeface="微软雅黑" panose="020B0503020204020204" pitchFamily="34" charset="-122"/>
+                <a:ea typeface="微软雅黑" panose="020B0503020204020204" pitchFamily="34" charset="-122"/>
+              </a:rPr>
+              <a:t>张嘉译饰演</a:t>
+            </a:r>
+          </a:p>
+        </p:txBody>
+      </p:sp>
+      <p:sp>
+        <p:nvSpPr>
+          <p:cNvPr id="38" name="矩形 37"/>
+          <p:cNvSpPr/>
+          <p:nvPr/>
+        </p:nvSpPr>
+        <p:spPr>
+          <a:xfrm>
+            <a:off x="5577907" y="2564904"/>
+            <a:ext cx="1548000" cy="216000"/>
+          </a:xfrm>
+          <a:prstGeom prst="rect">
+            <a:avLst/>
+          </a:prstGeom>
+          <a:ln w="12700"/>
+        </p:spPr>
+        <p:style>
+          <a:lnRef idx="2">
+            <a:schemeClr val="dk1"/>
+          </a:lnRef>
+          <a:fillRef idx="1">
+            <a:schemeClr val="lt1"/>
+          </a:fillRef>
+          <a:effectRef idx="0">
+            <a:schemeClr val="dk1"/>
+          </a:effectRef>
+          <a:fontRef idx="minor">
+            <a:schemeClr val="dk1"/>
+          </a:fontRef>
+        </p:style>
+        <p:txBody>
+          <a:bodyPr rtlCol="0" anchor="ctr"/>
+          <a:lstStyle/>
+          <a:p>
+            <a:pPr algn="ctr"/>
+            <a:r>
+              <a:rPr lang="zh-CN" altLang="en-US" sz="1000" dirty="0">
+                <a:latin typeface="微软雅黑" panose="020B0503020204020204" pitchFamily="34" charset="-122"/>
+                <a:ea typeface="微软雅黑" panose="020B0503020204020204" pitchFamily="34" charset="-122"/>
+              </a:rPr>
+              <a:t>小固</a:t>
+            </a:r>
+            <a:r>
+              <a:rPr lang="zh-CN" altLang="en-US" sz="1000" dirty="0" smtClean="0">
+                <a:latin typeface="微软雅黑" panose="020B0503020204020204" pitchFamily="34" charset="-122"/>
+                <a:ea typeface="微软雅黑" panose="020B0503020204020204" pitchFamily="34" charset="-122"/>
+              </a:rPr>
+              <a:t>   </a:t>
+            </a:r>
+            <a:r>
+              <a:rPr lang="en-US" altLang="zh-CN" sz="1000" dirty="0" smtClean="0">
+                <a:latin typeface="微软雅黑" panose="020B0503020204020204" pitchFamily="34" charset="-122"/>
+                <a:ea typeface="微软雅黑" panose="020B0503020204020204" pitchFamily="34" charset="-122"/>
+              </a:rPr>
+              <a:t>–</a:t>
+            </a:r>
+            <a:r>
+              <a:rPr lang="zh-CN" altLang="en-US" sz="1000" dirty="0">
+                <a:latin typeface="微软雅黑" panose="020B0503020204020204" pitchFamily="34" charset="-122"/>
+                <a:ea typeface="微软雅黑" panose="020B0503020204020204" pitchFamily="34" charset="-122"/>
+              </a:rPr>
+              <a:t>郭麒麟</a:t>
+            </a:r>
+            <a:r>
+              <a:rPr lang="zh-CN" altLang="en-US" sz="1000" dirty="0" smtClean="0">
+                <a:latin typeface="微软雅黑" panose="020B0503020204020204" pitchFamily="34" charset="-122"/>
+                <a:ea typeface="微软雅黑" panose="020B0503020204020204" pitchFamily="34" charset="-122"/>
+              </a:rPr>
+              <a:t>饰演</a:t>
+            </a:r>
+            <a:endParaRPr lang="zh-CN" altLang="en-US" sz="1000" dirty="0">
+              <a:latin typeface="微软雅黑" panose="020B0503020204020204" pitchFamily="34" charset="-122"/>
+              <a:ea typeface="微软雅黑" panose="020B0503020204020204" pitchFamily="34" charset="-122"/>
+            </a:endParaRPr>
+          </a:p>
+        </p:txBody>
+      </p:sp>
       <p:pic>
         <p:nvPicPr>
-          <p:cNvPr id="35" name="Picture 3"/>
+          <p:cNvPr id="39" name="Picture 3"/>
           <p:cNvPicPr>
             <a:picLocks noChangeAspect="1" noChangeArrowheads="1"/>
           </p:cNvPicPr>
@@ -5972,8 +6094,8 @@
         </p:blipFill>
         <p:spPr bwMode="auto">
           <a:xfrm>
-            <a:off x="4255200" y="1703438"/>
-            <a:ext cx="565471" cy="848205"/>
+            <a:off x="5794146" y="1693450"/>
+            <a:ext cx="1115521" cy="718396"/>
           </a:xfrm>
           <a:prstGeom prst="rect">
             <a:avLst/>
@@ -6015,13 +6137,13 @@
       </p:pic>
       <p:sp>
         <p:nvSpPr>
-          <p:cNvPr id="37" name="矩形 36"/>
+          <p:cNvPr id="41" name="矩形 40"/>
           <p:cNvSpPr/>
           <p:nvPr/>
         </p:nvSpPr>
         <p:spPr>
           <a:xfrm>
-            <a:off x="5577907" y="1477450"/>
+            <a:off x="5577907" y="3573040"/>
             <a:ext cx="1548000" cy="216000"/>
           </a:xfrm>
           <a:prstGeom prst="rect">
@@ -6053,7 +6175,7 @@
                 <a:latin typeface="微软雅黑" panose="020B0503020204020204" pitchFamily="34" charset="-122"/>
                 <a:ea typeface="微软雅黑" panose="020B0503020204020204" pitchFamily="34" charset="-122"/>
               </a:rPr>
-              <a:t>王一鸣</a:t>
+              <a:t>王小磊</a:t>
             </a:r>
             <a:r>
               <a:rPr lang="zh-CN" altLang="en-US" sz="1000" dirty="0" smtClean="0">
@@ -6074,20 +6196,20 @@
                 <a:latin typeface="微软雅黑" panose="020B0503020204020204" pitchFamily="34" charset="-122"/>
                 <a:ea typeface="微软雅黑" panose="020B0503020204020204" pitchFamily="34" charset="-122"/>
               </a:rPr>
-              <a:t>张嘉译饰演</a:t>
-            </a:r>
-          </a:p>
-        </p:txBody>
-      </p:sp>
-      <p:sp>
-        <p:nvSpPr>
-          <p:cNvPr id="38" name="矩形 37"/>
+              <a:t>曹炳琨饰演</a:t>
+            </a:r>
+          </a:p>
+        </p:txBody>
+      </p:sp>
+      <p:sp>
+        <p:nvSpPr>
+          <p:cNvPr id="43" name="矩形 42"/>
           <p:cNvSpPr/>
           <p:nvPr/>
         </p:nvSpPr>
         <p:spPr>
           <a:xfrm>
-            <a:off x="5577907" y="2564904"/>
+            <a:off x="5577907" y="4581152"/>
             <a:ext cx="1548000" cy="216000"/>
           </a:xfrm>
           <a:prstGeom prst="rect">
@@ -6119,7 +6241,7 @@
                 <a:latin typeface="微软雅黑" panose="020B0503020204020204" pitchFamily="34" charset="-122"/>
                 <a:ea typeface="微软雅黑" panose="020B0503020204020204" pitchFamily="34" charset="-122"/>
               </a:rPr>
-              <a:t>小固</a:t>
+              <a:t>李子梦</a:t>
             </a:r>
             <a:r>
               <a:rPr lang="zh-CN" altLang="en-US" sz="1000" dirty="0" smtClean="0">
@@ -6140,7 +6262,7 @@
                 <a:latin typeface="微软雅黑" panose="020B0503020204020204" pitchFamily="34" charset="-122"/>
                 <a:ea typeface="微软雅黑" panose="020B0503020204020204" pitchFamily="34" charset="-122"/>
               </a:rPr>
-              <a:t>郭麒麟</a:t>
+              <a:t>张雨绮</a:t>
             </a:r>
             <a:r>
               <a:rPr lang="zh-CN" altLang="en-US" sz="1000" dirty="0" smtClean="0">
@@ -6158,7 +6280,7 @@
       </p:sp>
       <p:pic>
         <p:nvPicPr>
-          <p:cNvPr id="39" name="Picture 3"/>
+          <p:cNvPr id="44" name="Picture 11"/>
           <p:cNvPicPr>
             <a:picLocks noChangeAspect="1" noChangeArrowheads="1"/>
           </p:cNvPicPr>
@@ -6179,8 +6301,8 @@
         </p:blipFill>
         <p:spPr bwMode="auto">
           <a:xfrm>
-            <a:off x="5794146" y="1693450"/>
-            <a:ext cx="1115521" cy="718396"/>
+            <a:off x="5781087" y="5805264"/>
+            <a:ext cx="1128580" cy="753327"/>
           </a:xfrm>
           <a:prstGeom prst="rect">
             <a:avLst/>
@@ -6220,9 +6342,86 @@
           </a:extLst>
         </p:spPr>
       </p:pic>
+      <p:sp>
+        <p:nvSpPr>
+          <p:cNvPr id="45" name="矩形 44"/>
+          <p:cNvSpPr/>
+          <p:nvPr/>
+        </p:nvSpPr>
+        <p:spPr>
+          <a:xfrm>
+            <a:off x="5577907" y="5589264"/>
+            <a:ext cx="1548000" cy="216000"/>
+          </a:xfrm>
+          <a:prstGeom prst="rect">
+            <a:avLst/>
+          </a:prstGeom>
+          <a:ln w="12700"/>
+        </p:spPr>
+        <p:style>
+          <a:lnRef idx="2">
+            <a:schemeClr val="dk1"/>
+          </a:lnRef>
+          <a:fillRef idx="1">
+            <a:schemeClr val="lt1"/>
+          </a:fillRef>
+          <a:effectRef idx="0">
+            <a:schemeClr val="dk1"/>
+          </a:effectRef>
+          <a:fontRef idx="minor">
+            <a:schemeClr val="dk1"/>
+          </a:fontRef>
+        </p:style>
+        <p:txBody>
+          <a:bodyPr rtlCol="0" anchor="ctr"/>
+          <a:lstStyle/>
+          <a:p>
+            <a:pPr algn="ctr"/>
+            <a:r>
+              <a:rPr lang="zh-CN" altLang="en-US" sz="1000" dirty="0">
+                <a:latin typeface="微软雅黑" panose="020B0503020204020204" pitchFamily="34" charset="-122"/>
+                <a:ea typeface="微软雅黑" panose="020B0503020204020204" pitchFamily="34" charset="-122"/>
+              </a:rPr>
+              <a:t>黎明博士</a:t>
+            </a:r>
+            <a:r>
+              <a:rPr lang="zh-CN" altLang="en-US" sz="1000" dirty="0" smtClean="0">
+                <a:latin typeface="微软雅黑" panose="020B0503020204020204" pitchFamily="34" charset="-122"/>
+                <a:ea typeface="微软雅黑" panose="020B0503020204020204" pitchFamily="34" charset="-122"/>
+              </a:rPr>
+              <a:t>   </a:t>
+            </a:r>
+            <a:r>
+              <a:rPr lang="en-US" altLang="zh-CN" sz="1000" dirty="0" smtClean="0">
+                <a:latin typeface="微软雅黑" panose="020B0503020204020204" pitchFamily="34" charset="-122"/>
+                <a:ea typeface="微软雅黑" panose="020B0503020204020204" pitchFamily="34" charset="-122"/>
+              </a:rPr>
+              <a:t>–</a:t>
+            </a:r>
+            <a:r>
+              <a:rPr lang="zh-CN" altLang="en-US" sz="1000" dirty="0">
+                <a:latin typeface="微软雅黑" panose="020B0503020204020204" pitchFamily="34" charset="-122"/>
+                <a:ea typeface="微软雅黑" panose="020B0503020204020204" pitchFamily="34" charset="-122"/>
+              </a:rPr>
+              <a:t>高晓松</a:t>
+            </a:r>
+            <a:r>
+              <a:rPr lang="zh-CN" altLang="en-US" sz="1000" dirty="0" smtClean="0">
+                <a:latin typeface="微软雅黑" panose="020B0503020204020204" pitchFamily="34" charset="-122"/>
+                <a:ea typeface="微软雅黑" panose="020B0503020204020204" pitchFamily="34" charset="-122"/>
+              </a:rPr>
+              <a:t>饰演</a:t>
+            </a:r>
+            <a:endParaRPr lang="zh-CN" altLang="en-US" sz="1000" dirty="0">
+              <a:latin typeface="微软雅黑" panose="020B0503020204020204" pitchFamily="34" charset="-122"/>
+              <a:ea typeface="微软雅黑" panose="020B0503020204020204" pitchFamily="34" charset="-122"/>
+            </a:endParaRPr>
+          </a:p>
+        </p:txBody>
+      </p:sp>
       <p:pic>
         <p:nvPicPr>
-          <p:cNvPr id="40" name="Picture 6" descr="https://ss0.bdstatic.com/70cFvHSh_Q1YnxGkpoWK1HF6hhy/it/u=1906317638,2435563586&amp;fm=26&amp;gp=0.jpg"/>
+          <p:cNvPr id="46" name="Picture 13" descr="https://ss1.bdstatic.com/70cFvXSh_Q1YnxGkpoWK1HF6hhy/it/u=807831728,3913605867&amp;fm=26&amp;gp=0.jpg"/>
           <p:cNvPicPr>
             <a:picLocks noChangeAspect="1" noChangeArrowheads="1"/>
           </p:cNvPicPr>
@@ -6243,8 +6442,8 @@
         </p:blipFill>
         <p:spPr bwMode="auto">
           <a:xfrm>
-            <a:off x="5816602" y="3810383"/>
-            <a:ext cx="1127812" cy="700645"/>
+            <a:off x="6072838" y="2783036"/>
+            <a:ext cx="558136" cy="776925"/>
           </a:xfrm>
           <a:prstGeom prst="rect">
             <a:avLst/>
@@ -6261,86 +6460,9 @@
           </a:extLst>
         </p:spPr>
       </p:pic>
-      <p:sp>
-        <p:nvSpPr>
-          <p:cNvPr id="41" name="矩形 40"/>
-          <p:cNvSpPr/>
-          <p:nvPr/>
-        </p:nvSpPr>
-        <p:spPr>
-          <a:xfrm>
-            <a:off x="5577907" y="3573040"/>
-            <a:ext cx="1548000" cy="216000"/>
-          </a:xfrm>
-          <a:prstGeom prst="rect">
-            <a:avLst/>
-          </a:prstGeom>
-          <a:ln w="12700"/>
-        </p:spPr>
-        <p:style>
-          <a:lnRef idx="2">
-            <a:schemeClr val="dk1"/>
-          </a:lnRef>
-          <a:fillRef idx="1">
-            <a:schemeClr val="lt1"/>
-          </a:fillRef>
-          <a:effectRef idx="0">
-            <a:schemeClr val="dk1"/>
-          </a:effectRef>
-          <a:fontRef idx="minor">
-            <a:schemeClr val="dk1"/>
-          </a:fontRef>
-        </p:style>
-        <p:txBody>
-          <a:bodyPr rtlCol="0" anchor="ctr"/>
-          <a:lstStyle/>
-          <a:p>
-            <a:pPr algn="ctr"/>
-            <a:r>
-              <a:rPr lang="zh-CN" altLang="en-US" sz="1000" dirty="0">
-                <a:latin typeface="微软雅黑" panose="020B0503020204020204" pitchFamily="34" charset="-122"/>
-                <a:ea typeface="微软雅黑" panose="020B0503020204020204" pitchFamily="34" charset="-122"/>
-              </a:rPr>
-              <a:t>王小磊</a:t>
-            </a:r>
-            <a:r>
-              <a:rPr lang="zh-CN" altLang="en-US" sz="1000" dirty="0" smtClean="0">
-                <a:latin typeface="微软雅黑" panose="020B0503020204020204" pitchFamily="34" charset="-122"/>
-                <a:ea typeface="微软雅黑" panose="020B0503020204020204" pitchFamily="34" charset="-122"/>
-              </a:rPr>
-              <a:t>   </a:t>
-            </a:r>
-            <a:r>
-              <a:rPr lang="en-US" altLang="zh-CN" sz="1000" dirty="0" smtClean="0">
-                <a:latin typeface="微软雅黑" panose="020B0503020204020204" pitchFamily="34" charset="-122"/>
-                <a:ea typeface="微软雅黑" panose="020B0503020204020204" pitchFamily="34" charset="-122"/>
-              </a:rPr>
-              <a:t>–</a:t>
-            </a:r>
-            <a:r>
-              <a:rPr lang="zh-CN" altLang="en-US" sz="1000" dirty="0">
-                <a:latin typeface="微软雅黑" panose="020B0503020204020204" pitchFamily="34" charset="-122"/>
-                <a:ea typeface="微软雅黑" panose="020B0503020204020204" pitchFamily="34" charset="-122"/>
-              </a:rPr>
-              <a:t>刘德凯</a:t>
-            </a:r>
-            <a:r>
-              <a:rPr lang="zh-CN" altLang="en-US" sz="1000" dirty="0" smtClean="0">
-                <a:latin typeface="微软雅黑" panose="020B0503020204020204" pitchFamily="34" charset="-122"/>
-                <a:ea typeface="微软雅黑" panose="020B0503020204020204" pitchFamily="34" charset="-122"/>
-              </a:rPr>
-              <a:t>饰演</a:t>
-            </a:r>
-            <a:endParaRPr lang="zh-CN" altLang="en-US" sz="1000" dirty="0">
-              <a:latin typeface="微软雅黑" panose="020B0503020204020204" pitchFamily="34" charset="-122"/>
-              <a:ea typeface="微软雅黑" panose="020B0503020204020204" pitchFamily="34" charset="-122"/>
-            </a:endParaRPr>
-          </a:p>
-        </p:txBody>
-      </p:sp>
       <p:pic>
         <p:nvPicPr>
-          <p:cNvPr id="42" name="Picture 8" descr="https://ss0.bdstatic.com/70cFuHSh_Q1YnxGkpoWK1HF6hhy/it/u=3690588417,1774880447&amp;fm=26&amp;gp=0.jpg"/>
+          <p:cNvPr id="48" name="Picture 2"/>
           <p:cNvPicPr>
             <a:picLocks noChangeAspect="1" noChangeArrowheads="1"/>
           </p:cNvPicPr>
@@ -6361,126 +6483,8 @@
         </p:blipFill>
         <p:spPr bwMode="auto">
           <a:xfrm>
-            <a:off x="5781087" y="4808932"/>
-            <a:ext cx="1128580" cy="735834"/>
-          </a:xfrm>
-          <a:prstGeom prst="rect">
-            <a:avLst/>
-          </a:prstGeom>
-          <a:noFill/>
-          <a:extLst>
-            <a:ext uri="{909E8E84-426E-40DD-AFC4-6F175D3DCCD1}">
-              <a14:hiddenFill xmlns:a14="http://schemas.microsoft.com/office/drawing/2010/main">
-                <a:solidFill>
-                  <a:srgbClr val="FFFFFF"/>
-                </a:solidFill>
-              </a14:hiddenFill>
-            </a:ext>
-          </a:extLst>
-        </p:spPr>
-      </p:pic>
-      <p:sp>
-        <p:nvSpPr>
-          <p:cNvPr id="43" name="矩形 42"/>
-          <p:cNvSpPr/>
-          <p:nvPr/>
-        </p:nvSpPr>
-        <p:spPr>
-          <a:xfrm>
-            <a:off x="5577907" y="4581152"/>
-            <a:ext cx="1548000" cy="216000"/>
-          </a:xfrm>
-          <a:prstGeom prst="rect">
-            <a:avLst/>
-          </a:prstGeom>
-          <a:ln w="12700"/>
-        </p:spPr>
-        <p:style>
-          <a:lnRef idx="2">
-            <a:schemeClr val="dk1"/>
-          </a:lnRef>
-          <a:fillRef idx="1">
-            <a:schemeClr val="lt1"/>
-          </a:fillRef>
-          <a:effectRef idx="0">
-            <a:schemeClr val="dk1"/>
-          </a:effectRef>
-          <a:fontRef idx="minor">
-            <a:schemeClr val="dk1"/>
-          </a:fontRef>
-        </p:style>
-        <p:txBody>
-          <a:bodyPr rtlCol="0" anchor="ctr"/>
-          <a:lstStyle/>
-          <a:p>
-            <a:pPr algn="ctr"/>
-            <a:r>
-              <a:rPr lang="zh-CN" altLang="en-US" sz="1000" dirty="0">
-                <a:latin typeface="微软雅黑" panose="020B0503020204020204" pitchFamily="34" charset="-122"/>
-                <a:ea typeface="微软雅黑" panose="020B0503020204020204" pitchFamily="34" charset="-122"/>
-              </a:rPr>
-              <a:t>李子梦</a:t>
-            </a:r>
-            <a:r>
-              <a:rPr lang="zh-CN" altLang="en-US" sz="1000" dirty="0" smtClean="0">
-                <a:latin typeface="微软雅黑" panose="020B0503020204020204" pitchFamily="34" charset="-122"/>
-                <a:ea typeface="微软雅黑" panose="020B0503020204020204" pitchFamily="34" charset="-122"/>
-              </a:rPr>
-              <a:t>   </a:t>
-            </a:r>
-            <a:r>
-              <a:rPr lang="en-US" altLang="zh-CN" sz="1000" dirty="0" smtClean="0">
-                <a:latin typeface="微软雅黑" panose="020B0503020204020204" pitchFamily="34" charset="-122"/>
-                <a:ea typeface="微软雅黑" panose="020B0503020204020204" pitchFamily="34" charset="-122"/>
-              </a:rPr>
-              <a:t>–</a:t>
-            </a:r>
-            <a:r>
-              <a:rPr lang="zh-CN" altLang="en-US" sz="1000" dirty="0">
-                <a:latin typeface="微软雅黑" panose="020B0503020204020204" pitchFamily="34" charset="-122"/>
-                <a:ea typeface="微软雅黑" panose="020B0503020204020204" pitchFamily="34" charset="-122"/>
-              </a:rPr>
-              <a:t>闫妮</a:t>
-            </a:r>
-            <a:r>
-              <a:rPr lang="zh-CN" altLang="en-US" sz="1000" dirty="0" smtClean="0">
-                <a:latin typeface="微软雅黑" panose="020B0503020204020204" pitchFamily="34" charset="-122"/>
-                <a:ea typeface="微软雅黑" panose="020B0503020204020204" pitchFamily="34" charset="-122"/>
-              </a:rPr>
-              <a:t>饰演</a:t>
-            </a:r>
-            <a:endParaRPr lang="zh-CN" altLang="en-US" sz="1000" dirty="0">
-              <a:latin typeface="微软雅黑" panose="020B0503020204020204" pitchFamily="34" charset="-122"/>
-              <a:ea typeface="微软雅黑" panose="020B0503020204020204" pitchFamily="34" charset="-122"/>
-            </a:endParaRPr>
-          </a:p>
-        </p:txBody>
-      </p:sp>
-      <p:pic>
-        <p:nvPicPr>
-          <p:cNvPr id="44" name="Picture 11"/>
-          <p:cNvPicPr>
-            <a:picLocks noChangeAspect="1" noChangeArrowheads="1"/>
-          </p:cNvPicPr>
-          <p:nvPr/>
-        </p:nvPicPr>
-        <p:blipFill>
-          <a:blip r:embed="rId20" cstate="print">
-            <a:extLst>
-              <a:ext uri="{28A0092B-C50C-407E-A947-70E740481C1C}">
-                <a14:useLocalDpi xmlns:a14="http://schemas.microsoft.com/office/drawing/2010/main" val="0"/>
-              </a:ext>
-            </a:extLst>
-          </a:blip>
-          <a:srcRect/>
-          <a:stretch>
-            <a:fillRect/>
-          </a:stretch>
-        </p:blipFill>
-        <p:spPr bwMode="auto">
-          <a:xfrm>
-            <a:off x="5781087" y="5805264"/>
-            <a:ext cx="1128580" cy="753327"/>
+            <a:off x="7536108" y="1694741"/>
+            <a:ext cx="1259538" cy="957249"/>
           </a:xfrm>
           <a:prstGeom prst="rect">
             <a:avLst/>
@@ -6522,13 +6526,13 @@
       </p:pic>
       <p:sp>
         <p:nvSpPr>
-          <p:cNvPr id="45" name="矩形 44"/>
+          <p:cNvPr id="49" name="矩形 48"/>
           <p:cNvSpPr/>
           <p:nvPr/>
         </p:nvSpPr>
         <p:spPr>
           <a:xfrm>
-            <a:off x="5577907" y="5589264"/>
+            <a:off x="7391877" y="1477450"/>
             <a:ext cx="1548000" cy="216000"/>
           </a:xfrm>
           <a:prstGeom prst="rect">
@@ -6556,32 +6560,25 @@
           <a:p>
             <a:pPr algn="ctr"/>
             <a:r>
+              <a:rPr lang="zh-CN" altLang="en-US" sz="1000" dirty="0" smtClean="0">
+                <a:latin typeface="微软雅黑" panose="020B0503020204020204" pitchFamily="34" charset="-122"/>
+                <a:ea typeface="微软雅黑" panose="020B0503020204020204" pitchFamily="34" charset="-122"/>
+              </a:rPr>
+              <a:t>泰爷   </a:t>
+            </a:r>
+            <a:r>
+              <a:rPr lang="en-US" altLang="zh-CN" sz="1000" dirty="0" smtClean="0">
+                <a:latin typeface="微软雅黑" panose="020B0503020204020204" pitchFamily="34" charset="-122"/>
+                <a:ea typeface="微软雅黑" panose="020B0503020204020204" pitchFamily="34" charset="-122"/>
+              </a:rPr>
+              <a:t>–</a:t>
+            </a:r>
+            <a:r>
               <a:rPr lang="zh-CN" altLang="en-US" sz="1000" dirty="0">
                 <a:latin typeface="微软雅黑" panose="020B0503020204020204" pitchFamily="34" charset="-122"/>
                 <a:ea typeface="微软雅黑" panose="020B0503020204020204" pitchFamily="34" charset="-122"/>
               </a:rPr>
-              <a:t>黎明博士</a:t>
-            </a:r>
-            <a:r>
-              <a:rPr lang="zh-CN" altLang="en-US" sz="1000" dirty="0" smtClean="0">
-                <a:latin typeface="微软雅黑" panose="020B0503020204020204" pitchFamily="34" charset="-122"/>
-                <a:ea typeface="微软雅黑" panose="020B0503020204020204" pitchFamily="34" charset="-122"/>
-              </a:rPr>
-              <a:t>   </a:t>
-            </a:r>
-            <a:r>
-              <a:rPr lang="en-US" altLang="zh-CN" sz="1000" dirty="0" smtClean="0">
-                <a:latin typeface="微软雅黑" panose="020B0503020204020204" pitchFamily="34" charset="-122"/>
-                <a:ea typeface="微软雅黑" panose="020B0503020204020204" pitchFamily="34" charset="-122"/>
-              </a:rPr>
-              <a:t>–</a:t>
-            </a:r>
-            <a:r>
-              <a:rPr lang="zh-CN" altLang="en-US" sz="1000" dirty="0">
-                <a:latin typeface="微软雅黑" panose="020B0503020204020204" pitchFamily="34" charset="-122"/>
-                <a:ea typeface="微软雅黑" panose="020B0503020204020204" pitchFamily="34" charset="-122"/>
-              </a:rPr>
-              <a:t>高晓松</a:t>
+              <a:t>王绘春</a:t>
             </a:r>
             <a:r>
               <a:rPr lang="zh-CN" altLang="en-US" sz="1000" dirty="0" smtClean="0">
@@ -6597,9 +6594,120 @@
           </a:p>
         </p:txBody>
       </p:sp>
+      <p:sp>
+        <p:nvSpPr>
+          <p:cNvPr id="50" name="矩形 49"/>
+          <p:cNvSpPr/>
+          <p:nvPr/>
+        </p:nvSpPr>
+        <p:spPr>
+          <a:xfrm>
+            <a:off x="7391877" y="2771935"/>
+            <a:ext cx="1548000" cy="216000"/>
+          </a:xfrm>
+          <a:prstGeom prst="rect">
+            <a:avLst/>
+          </a:prstGeom>
+          <a:ln w="12700"/>
+        </p:spPr>
+        <p:style>
+          <a:lnRef idx="2">
+            <a:schemeClr val="dk1"/>
+          </a:lnRef>
+          <a:fillRef idx="1">
+            <a:schemeClr val="lt1"/>
+          </a:fillRef>
+          <a:effectRef idx="0">
+            <a:schemeClr val="dk1"/>
+          </a:effectRef>
+          <a:fontRef idx="minor">
+            <a:schemeClr val="dk1"/>
+          </a:fontRef>
+        </p:style>
+        <p:txBody>
+          <a:bodyPr rtlCol="0" anchor="ctr"/>
+          <a:lstStyle/>
+          <a:p>
+            <a:pPr algn="ctr"/>
+            <a:r>
+              <a:rPr lang="zh-CN" altLang="en-US" sz="1000" dirty="0">
+                <a:latin typeface="微软雅黑" panose="020B0503020204020204" pitchFamily="34" charset="-122"/>
+                <a:ea typeface="微软雅黑" panose="020B0503020204020204" pitchFamily="34" charset="-122"/>
+              </a:rPr>
+              <a:t>亮爷</a:t>
+            </a:r>
+            <a:r>
+              <a:rPr lang="zh-CN" altLang="en-US" sz="1000" dirty="0" smtClean="0">
+                <a:latin typeface="微软雅黑" panose="020B0503020204020204" pitchFamily="34" charset="-122"/>
+                <a:ea typeface="微软雅黑" panose="020B0503020204020204" pitchFamily="34" charset="-122"/>
+              </a:rPr>
+              <a:t>   </a:t>
+            </a:r>
+            <a:r>
+              <a:rPr lang="en-US" altLang="zh-CN" sz="1000" dirty="0" smtClean="0">
+                <a:latin typeface="微软雅黑" panose="020B0503020204020204" pitchFamily="34" charset="-122"/>
+                <a:ea typeface="微软雅黑" panose="020B0503020204020204" pitchFamily="34" charset="-122"/>
+              </a:rPr>
+              <a:t>–</a:t>
+            </a:r>
+            <a:r>
+              <a:rPr lang="zh-CN" altLang="en-US" sz="1000" dirty="0" smtClean="0">
+                <a:latin typeface="微软雅黑" panose="020B0503020204020204" pitchFamily="34" charset="-122"/>
+                <a:ea typeface="微软雅黑" panose="020B0503020204020204" pitchFamily="34" charset="-122"/>
+              </a:rPr>
+              <a:t>于谦饰演</a:t>
+            </a:r>
+            <a:endParaRPr lang="zh-CN" altLang="en-US" sz="1000" dirty="0">
+              <a:latin typeface="微软雅黑" panose="020B0503020204020204" pitchFamily="34" charset="-122"/>
+              <a:ea typeface="微软雅黑" panose="020B0503020204020204" pitchFamily="34" charset="-122"/>
+            </a:endParaRPr>
+          </a:p>
+        </p:txBody>
+      </p:sp>
       <p:pic>
         <p:nvPicPr>
-          <p:cNvPr id="46" name="Picture 13" descr="https://ss1.bdstatic.com/70cFvXSh_Q1YnxGkpoWK1HF6hhy/it/u=807831728,3913605867&amp;fm=26&amp;gp=0.jpg"/>
+          <p:cNvPr id="51" name="Picture 4" descr="https://ss3.bdstatic.com/70cFv8Sh_Q1YnxGkpoWK1HF6hhy/it/u=1729001356,1855811453&amp;fm=26&amp;gp=0.jpg"/>
+          <p:cNvPicPr>
+            <a:picLocks noChangeAspect="1" noChangeArrowheads="1"/>
+          </p:cNvPicPr>
+          <p:nvPr/>
+        </p:nvPicPr>
+        <p:blipFill>
+          <a:blip r:embed="rId20" cstate="print">
+            <a:extLst>
+              <a:ext uri="{28A0092B-C50C-407E-A947-70E740481C1C}">
+                <a14:useLocalDpi xmlns:a14="http://schemas.microsoft.com/office/drawing/2010/main" val="0"/>
+              </a:ext>
+            </a:extLst>
+          </a:blip>
+          <a:srcRect/>
+          <a:stretch>
+            <a:fillRect/>
+          </a:stretch>
+        </p:blipFill>
+        <p:spPr bwMode="auto">
+          <a:xfrm>
+            <a:off x="7536108" y="2993638"/>
+            <a:ext cx="1287330" cy="1163365"/>
+          </a:xfrm>
+          <a:prstGeom prst="rect">
+            <a:avLst/>
+          </a:prstGeom>
+          <a:noFill/>
+          <a:extLst>
+            <a:ext uri="{909E8E84-426E-40DD-AFC4-6F175D3DCCD1}">
+              <a14:hiddenFill xmlns:a14="http://schemas.microsoft.com/office/drawing/2010/main">
+                <a:solidFill>
+                  <a:srgbClr val="FFFFFF"/>
+                </a:solidFill>
+              </a14:hiddenFill>
+            </a:ext>
+          </a:extLst>
+        </p:spPr>
+      </p:pic>
+      <p:pic>
+        <p:nvPicPr>
+          <p:cNvPr id="1026" name="Picture 2"/>
           <p:cNvPicPr>
             <a:picLocks noChangeAspect="1" noChangeArrowheads="1"/>
           </p:cNvPicPr>
@@ -6620,49 +6728,8 @@
         </p:blipFill>
         <p:spPr bwMode="auto">
           <a:xfrm>
-            <a:off x="6072838" y="2770844"/>
-            <a:ext cx="558136" cy="776925"/>
-          </a:xfrm>
-          <a:prstGeom prst="rect">
-            <a:avLst/>
-          </a:prstGeom>
-          <a:noFill/>
-          <a:extLst>
-            <a:ext uri="{909E8E84-426E-40DD-AFC4-6F175D3DCCD1}">
-              <a14:hiddenFill xmlns:a14="http://schemas.microsoft.com/office/drawing/2010/main">
-                <a:solidFill>
-                  <a:srgbClr val="FFFFFF"/>
-                </a:solidFill>
-              </a14:hiddenFill>
-            </a:ext>
-          </a:extLst>
-        </p:spPr>
-      </p:pic>
-      <p:pic>
-        <p:nvPicPr>
-          <p:cNvPr id="48" name="Picture 2"/>
-          <p:cNvPicPr>
-            <a:picLocks noChangeAspect="1" noChangeArrowheads="1"/>
-          </p:cNvPicPr>
-          <p:nvPr/>
-        </p:nvPicPr>
-        <p:blipFill>
-          <a:blip r:embed="rId22" cstate="print">
-            <a:extLst>
-              <a:ext uri="{28A0092B-C50C-407E-A947-70E740481C1C}">
-                <a14:useLocalDpi xmlns:a14="http://schemas.microsoft.com/office/drawing/2010/main" val="0"/>
-              </a:ext>
-            </a:extLst>
-          </a:blip>
-          <a:srcRect/>
-          <a:stretch>
-            <a:fillRect/>
-          </a:stretch>
-        </p:blipFill>
-        <p:spPr bwMode="auto">
-          <a:xfrm>
-            <a:off x="7536108" y="1694741"/>
-            <a:ext cx="1259538" cy="957249"/>
+            <a:off x="5891137" y="3801232"/>
+            <a:ext cx="994021" cy="730186"/>
           </a:xfrm>
           <a:prstGeom prst="rect">
             <a:avLst/>
@@ -6702,149 +6769,73 @@
           </a:extLst>
         </p:spPr>
       </p:pic>
-      <p:sp>
-        <p:nvSpPr>
-          <p:cNvPr id="49" name="矩形 48"/>
-          <p:cNvSpPr/>
+      <p:pic>
+        <p:nvPicPr>
+          <p:cNvPr id="1027" name="Picture 3"/>
+          <p:cNvPicPr>
+            <a:picLocks noChangeAspect="1" noChangeArrowheads="1"/>
+          </p:cNvPicPr>
           <p:nvPr/>
-        </p:nvSpPr>
-        <p:spPr>
-          <a:xfrm>
-            <a:off x="7391877" y="1477450"/>
-            <a:ext cx="1548000" cy="216000"/>
+        </p:nvPicPr>
+        <p:blipFill>
+          <a:blip r:embed="rId22" cstate="print">
+            <a:extLst>
+              <a:ext uri="{28A0092B-C50C-407E-A947-70E740481C1C}">
+                <a14:useLocalDpi xmlns:a14="http://schemas.microsoft.com/office/drawing/2010/main" val="0"/>
+              </a:ext>
+            </a:extLst>
+          </a:blip>
+          <a:srcRect/>
+          <a:stretch>
+            <a:fillRect/>
+          </a:stretch>
+        </p:blipFill>
+        <p:spPr bwMode="auto">
+          <a:xfrm>
+            <a:off x="3970286" y="4805111"/>
+            <a:ext cx="1135299" cy="747027"/>
           </a:xfrm>
           <a:prstGeom prst="rect">
             <a:avLst/>
           </a:prstGeom>
-          <a:ln w="12700"/>
-        </p:spPr>
-        <p:style>
-          <a:lnRef idx="2">
-            <a:schemeClr val="dk1"/>
-          </a:lnRef>
-          <a:fillRef idx="1">
-            <a:schemeClr val="lt1"/>
-          </a:fillRef>
-          <a:effectRef idx="0">
-            <a:schemeClr val="dk1"/>
-          </a:effectRef>
-          <a:fontRef idx="minor">
-            <a:schemeClr val="dk1"/>
-          </a:fontRef>
-        </p:style>
-        <p:txBody>
-          <a:bodyPr rtlCol="0" anchor="ctr"/>
-          <a:lstStyle/>
-          <a:p>
-            <a:pPr algn="ctr"/>
-            <a:r>
-              <a:rPr lang="zh-CN" altLang="en-US" sz="1000" dirty="0" smtClean="0">
-                <a:latin typeface="微软雅黑" panose="020B0503020204020204" pitchFamily="34" charset="-122"/>
-                <a:ea typeface="微软雅黑" panose="020B0503020204020204" pitchFamily="34" charset="-122"/>
-              </a:rPr>
-              <a:t>泰爷   </a:t>
-            </a:r>
-            <a:r>
-              <a:rPr lang="en-US" altLang="zh-CN" sz="1000" dirty="0" smtClean="0">
-                <a:latin typeface="微软雅黑" panose="020B0503020204020204" pitchFamily="34" charset="-122"/>
-                <a:ea typeface="微软雅黑" panose="020B0503020204020204" pitchFamily="34" charset="-122"/>
-              </a:rPr>
-              <a:t>–</a:t>
-            </a:r>
-            <a:r>
-              <a:rPr lang="zh-CN" altLang="en-US" sz="1000" dirty="0">
-                <a:latin typeface="微软雅黑" panose="020B0503020204020204" pitchFamily="34" charset="-122"/>
-                <a:ea typeface="微软雅黑" panose="020B0503020204020204" pitchFamily="34" charset="-122"/>
-              </a:rPr>
-              <a:t>王绘春</a:t>
-            </a:r>
-            <a:r>
-              <a:rPr lang="zh-CN" altLang="en-US" sz="1000" dirty="0" smtClean="0">
-                <a:latin typeface="微软雅黑" panose="020B0503020204020204" pitchFamily="34" charset="-122"/>
-                <a:ea typeface="微软雅黑" panose="020B0503020204020204" pitchFamily="34" charset="-122"/>
-              </a:rPr>
-              <a:t>饰演</a:t>
-            </a:r>
-            <a:endParaRPr lang="zh-CN" altLang="en-US" sz="1000" dirty="0">
-              <a:latin typeface="微软雅黑" panose="020B0503020204020204" pitchFamily="34" charset="-122"/>
-              <a:ea typeface="微软雅黑" panose="020B0503020204020204" pitchFamily="34" charset="-122"/>
-            </a:endParaRPr>
-          </a:p>
-        </p:txBody>
-      </p:sp>
-      <p:sp>
-        <p:nvSpPr>
-          <p:cNvPr id="50" name="矩形 49"/>
-          <p:cNvSpPr/>
-          <p:nvPr/>
-        </p:nvSpPr>
-        <p:spPr>
-          <a:xfrm>
-            <a:off x="7391877" y="2869684"/>
-            <a:ext cx="1548000" cy="216000"/>
-          </a:xfrm>
-          <a:prstGeom prst="rect">
-            <a:avLst/>
-          </a:prstGeom>
-          <a:ln w="12700"/>
-        </p:spPr>
-        <p:style>
-          <a:lnRef idx="2">
-            <a:schemeClr val="dk1"/>
-          </a:lnRef>
-          <a:fillRef idx="1">
-            <a:schemeClr val="lt1"/>
-          </a:fillRef>
-          <a:effectRef idx="0">
-            <a:schemeClr val="dk1"/>
-          </a:effectRef>
-          <a:fontRef idx="minor">
-            <a:schemeClr val="dk1"/>
-          </a:fontRef>
-        </p:style>
-        <p:txBody>
-          <a:bodyPr rtlCol="0" anchor="ctr"/>
-          <a:lstStyle/>
-          <a:p>
-            <a:pPr algn="ctr"/>
-            <a:r>
-              <a:rPr lang="zh-CN" altLang="en-US" sz="1000" dirty="0">
-                <a:latin typeface="微软雅黑" panose="020B0503020204020204" pitchFamily="34" charset="-122"/>
-                <a:ea typeface="微软雅黑" panose="020B0503020204020204" pitchFamily="34" charset="-122"/>
-              </a:rPr>
-              <a:t>亮爷</a:t>
-            </a:r>
-            <a:r>
-              <a:rPr lang="zh-CN" altLang="en-US" sz="1000" dirty="0" smtClean="0">
-                <a:latin typeface="微软雅黑" panose="020B0503020204020204" pitchFamily="34" charset="-122"/>
-                <a:ea typeface="微软雅黑" panose="020B0503020204020204" pitchFamily="34" charset="-122"/>
-              </a:rPr>
-              <a:t>   </a:t>
-            </a:r>
-            <a:r>
-              <a:rPr lang="en-US" altLang="zh-CN" sz="1000" dirty="0" smtClean="0">
-                <a:latin typeface="微软雅黑" panose="020B0503020204020204" pitchFamily="34" charset="-122"/>
-                <a:ea typeface="微软雅黑" panose="020B0503020204020204" pitchFamily="34" charset="-122"/>
-              </a:rPr>
-              <a:t>–</a:t>
-            </a:r>
-            <a:r>
-              <a:rPr lang="zh-CN" altLang="en-US" sz="1000" dirty="0" smtClean="0">
-                <a:latin typeface="微软雅黑" panose="020B0503020204020204" pitchFamily="34" charset="-122"/>
-                <a:ea typeface="微软雅黑" panose="020B0503020204020204" pitchFamily="34" charset="-122"/>
-              </a:rPr>
-              <a:t>于谦饰演</a:t>
-            </a:r>
-            <a:endParaRPr lang="zh-CN" altLang="en-US" sz="1000" dirty="0">
-              <a:latin typeface="微软雅黑" panose="020B0503020204020204" pitchFamily="34" charset="-122"/>
-              <a:ea typeface="微软雅黑" panose="020B0503020204020204" pitchFamily="34" charset="-122"/>
-            </a:endParaRPr>
-          </a:p>
-        </p:txBody>
-      </p:sp>
+          <a:noFill/>
+          <a:ln>
+            <a:noFill/>
+          </a:ln>
+          <a:effectLst/>
+          <a:extLst>
+            <a:ext uri="{909E8E84-426E-40DD-AFC4-6F175D3DCCD1}">
+              <a14:hiddenFill xmlns:a14="http://schemas.microsoft.com/office/drawing/2010/main">
+                <a:solidFill>
+                  <a:schemeClr val="accent1"/>
+                </a:solidFill>
+              </a14:hiddenFill>
+            </a:ext>
+            <a:ext uri="{91240B29-F687-4F45-9708-019B960494DF}">
+              <a14:hiddenLine xmlns:a14="http://schemas.microsoft.com/office/drawing/2010/main" w="9525">
+                <a:solidFill>
+                  <a:schemeClr val="tx1"/>
+                </a:solidFill>
+                <a:miter lim="800000"/>
+                <a:headEnd/>
+                <a:tailEnd/>
+              </a14:hiddenLine>
+            </a:ext>
+            <a:ext uri="{AF507438-7753-43E0-B8FC-AC1667EBCBE1}">
+              <a14:hiddenEffects xmlns:a14="http://schemas.microsoft.com/office/drawing/2010/main">
+                <a:effectLst>
+                  <a:outerShdw dist="35921" dir="2700000" algn="ctr" rotWithShape="0">
+                    <a:schemeClr val="bg2"/>
+                  </a:outerShdw>
+                </a:effectLst>
+              </a14:hiddenEffects>
+            </a:ext>
+          </a:extLst>
+        </p:spPr>
+      </p:pic>
       <p:pic>
         <p:nvPicPr>
-          <p:cNvPr id="51" name="Picture 4" descr="https://ss3.bdstatic.com/70cFv8Sh_Q1YnxGkpoWK1HF6hhy/it/u=1729001356,1855811453&amp;fm=26&amp;gp=0.jpg"/>
+          <p:cNvPr id="1028" name="Picture 4"/>
           <p:cNvPicPr>
             <a:picLocks noChangeAspect="1" noChangeArrowheads="1"/>
           </p:cNvPicPr>
@@ -6865,20 +6856,304 @@
         </p:blipFill>
         <p:spPr bwMode="auto">
           <a:xfrm>
-            <a:off x="7536108" y="3091387"/>
-            <a:ext cx="1287330" cy="1163365"/>
+            <a:off x="5805906" y="4803248"/>
+            <a:ext cx="1164481" cy="728965"/>
           </a:xfrm>
           <a:prstGeom prst="rect">
             <a:avLst/>
           </a:prstGeom>
           <a:noFill/>
+          <a:ln>
+            <a:noFill/>
+          </a:ln>
+          <a:effectLst/>
           <a:extLst>
             <a:ext uri="{909E8E84-426E-40DD-AFC4-6F175D3DCCD1}">
               <a14:hiddenFill xmlns:a14="http://schemas.microsoft.com/office/drawing/2010/main">
                 <a:solidFill>
-                  <a:srgbClr val="FFFFFF"/>
+                  <a:schemeClr val="accent1"/>
                 </a:solidFill>
               </a14:hiddenFill>
+            </a:ext>
+            <a:ext uri="{91240B29-F687-4F45-9708-019B960494DF}">
+              <a14:hiddenLine xmlns:a14="http://schemas.microsoft.com/office/drawing/2010/main" w="9525">
+                <a:solidFill>
+                  <a:schemeClr val="tx1"/>
+                </a:solidFill>
+                <a:miter lim="800000"/>
+                <a:headEnd/>
+                <a:tailEnd/>
+              </a14:hiddenLine>
+            </a:ext>
+            <a:ext uri="{AF507438-7753-43E0-B8FC-AC1667EBCBE1}">
+              <a14:hiddenEffects xmlns:a14="http://schemas.microsoft.com/office/drawing/2010/main">
+                <a:effectLst>
+                  <a:outerShdw dist="35921" dir="2700000" algn="ctr" rotWithShape="0">
+                    <a:schemeClr val="bg2"/>
+                  </a:outerShdw>
+                </a:effectLst>
+              </a14:hiddenEffects>
+            </a:ext>
+          </a:extLst>
+        </p:spPr>
+      </p:pic>
+      <p:pic>
+        <p:nvPicPr>
+          <p:cNvPr id="3" name="Picture 2"/>
+          <p:cNvPicPr>
+            <a:picLocks noChangeAspect="1" noChangeArrowheads="1"/>
+          </p:cNvPicPr>
+          <p:nvPr/>
+        </p:nvPicPr>
+        <p:blipFill>
+          <a:blip r:embed="rId24" cstate="print">
+            <a:extLst>
+              <a:ext uri="{28A0092B-C50C-407E-A947-70E740481C1C}">
+                <a14:useLocalDpi xmlns:a14="http://schemas.microsoft.com/office/drawing/2010/main" val="0"/>
+              </a:ext>
+            </a:extLst>
+          </a:blip>
+          <a:srcRect/>
+          <a:stretch>
+            <a:fillRect/>
+          </a:stretch>
+        </p:blipFill>
+        <p:spPr bwMode="auto">
+          <a:xfrm>
+            <a:off x="7500589" y="5726947"/>
+            <a:ext cx="1330575" cy="830279"/>
+          </a:xfrm>
+          <a:prstGeom prst="rect">
+            <a:avLst/>
+          </a:prstGeom>
+          <a:noFill/>
+          <a:ln>
+            <a:noFill/>
+          </a:ln>
+          <a:effectLst/>
+          <a:extLst>
+            <a:ext uri="{909E8E84-426E-40DD-AFC4-6F175D3DCCD1}">
+              <a14:hiddenFill xmlns:a14="http://schemas.microsoft.com/office/drawing/2010/main">
+                <a:solidFill>
+                  <a:schemeClr val="accent1"/>
+                </a:solidFill>
+              </a14:hiddenFill>
+            </a:ext>
+            <a:ext uri="{91240B29-F687-4F45-9708-019B960494DF}">
+              <a14:hiddenLine xmlns:a14="http://schemas.microsoft.com/office/drawing/2010/main" w="9525">
+                <a:solidFill>
+                  <a:schemeClr val="tx1"/>
+                </a:solidFill>
+                <a:miter lim="800000"/>
+                <a:headEnd/>
+                <a:tailEnd/>
+              </a14:hiddenLine>
+            </a:ext>
+            <a:ext uri="{AF507438-7753-43E0-B8FC-AC1667EBCBE1}">
+              <a14:hiddenEffects xmlns:a14="http://schemas.microsoft.com/office/drawing/2010/main">
+                <a:effectLst>
+                  <a:outerShdw dist="35921" dir="2700000" algn="ctr" rotWithShape="0">
+                    <a:schemeClr val="bg2"/>
+                  </a:outerShdw>
+                </a:effectLst>
+              </a14:hiddenEffects>
+            </a:ext>
+          </a:extLst>
+        </p:spPr>
+      </p:pic>
+      <p:sp>
+        <p:nvSpPr>
+          <p:cNvPr id="52" name="矩形 51"/>
+          <p:cNvSpPr/>
+          <p:nvPr/>
+        </p:nvSpPr>
+        <p:spPr>
+          <a:xfrm>
+            <a:off x="7391876" y="5510947"/>
+            <a:ext cx="1548000" cy="216000"/>
+          </a:xfrm>
+          <a:prstGeom prst="rect">
+            <a:avLst/>
+          </a:prstGeom>
+          <a:ln w="12700"/>
+        </p:spPr>
+        <p:style>
+          <a:lnRef idx="2">
+            <a:schemeClr val="dk1"/>
+          </a:lnRef>
+          <a:fillRef idx="1">
+            <a:schemeClr val="lt1"/>
+          </a:fillRef>
+          <a:effectRef idx="0">
+            <a:schemeClr val="dk1"/>
+          </a:effectRef>
+          <a:fontRef idx="minor">
+            <a:schemeClr val="dk1"/>
+          </a:fontRef>
+        </p:style>
+        <p:txBody>
+          <a:bodyPr rtlCol="0" anchor="ctr"/>
+          <a:lstStyle/>
+          <a:p>
+            <a:pPr algn="ctr"/>
+            <a:r>
+              <a:rPr lang="zh-CN" altLang="en-US" sz="1000" dirty="0">
+                <a:latin typeface="微软雅黑" panose="020B0503020204020204" pitchFamily="34" charset="-122"/>
+                <a:ea typeface="微软雅黑" panose="020B0503020204020204" pitchFamily="34" charset="-122"/>
+              </a:rPr>
+              <a:t>京西鹦翠</a:t>
+            </a:r>
+            <a:r>
+              <a:rPr lang="zh-CN" altLang="en-US" sz="1000" dirty="0" smtClean="0">
+                <a:latin typeface="微软雅黑" panose="020B0503020204020204" pitchFamily="34" charset="-122"/>
+                <a:ea typeface="微软雅黑" panose="020B0503020204020204" pitchFamily="34" charset="-122"/>
+              </a:rPr>
+              <a:t>   </a:t>
+            </a:r>
+            <a:r>
+              <a:rPr lang="en-US" altLang="zh-CN" sz="1000" dirty="0" smtClean="0">
+                <a:latin typeface="微软雅黑" panose="020B0503020204020204" pitchFamily="34" charset="-122"/>
+                <a:ea typeface="微软雅黑" panose="020B0503020204020204" pitchFamily="34" charset="-122"/>
+              </a:rPr>
+              <a:t>–</a:t>
+            </a:r>
+            <a:r>
+              <a:rPr lang="zh-CN" altLang="en-US" sz="1000" dirty="0" smtClean="0">
+                <a:latin typeface="微软雅黑" panose="020B0503020204020204" pitchFamily="34" charset="-122"/>
+                <a:ea typeface="微软雅黑" panose="020B0503020204020204" pitchFamily="34" charset="-122"/>
+              </a:rPr>
+              <a:t>科大讯飞</a:t>
+            </a:r>
+            <a:endParaRPr lang="zh-CN" altLang="en-US" sz="1000" dirty="0">
+              <a:latin typeface="微软雅黑" panose="020B0503020204020204" pitchFamily="34" charset="-122"/>
+              <a:ea typeface="微软雅黑" panose="020B0503020204020204" pitchFamily="34" charset="-122"/>
+            </a:endParaRPr>
+          </a:p>
+        </p:txBody>
+      </p:sp>
+      <p:sp>
+        <p:nvSpPr>
+          <p:cNvPr id="53" name="矩形 52"/>
+          <p:cNvSpPr/>
+          <p:nvPr/>
+        </p:nvSpPr>
+        <p:spPr>
+          <a:xfrm>
+            <a:off x="7405773" y="4247185"/>
+            <a:ext cx="1548000" cy="216000"/>
+          </a:xfrm>
+          <a:prstGeom prst="rect">
+            <a:avLst/>
+          </a:prstGeom>
+          <a:ln w="12700"/>
+        </p:spPr>
+        <p:style>
+          <a:lnRef idx="2">
+            <a:schemeClr val="dk1"/>
+          </a:lnRef>
+          <a:fillRef idx="1">
+            <a:schemeClr val="lt1"/>
+          </a:fillRef>
+          <a:effectRef idx="0">
+            <a:schemeClr val="dk1"/>
+          </a:effectRef>
+          <a:fontRef idx="minor">
+            <a:schemeClr val="dk1"/>
+          </a:fontRef>
+        </p:style>
+        <p:txBody>
+          <a:bodyPr rtlCol="0" anchor="ctr"/>
+          <a:lstStyle/>
+          <a:p>
+            <a:pPr algn="ctr"/>
+            <a:r>
+              <a:rPr lang="zh-CN" altLang="en-US" sz="1000" dirty="0" smtClean="0">
+                <a:latin typeface="微软雅黑" panose="020B0503020204020204" pitchFamily="34" charset="-122"/>
+                <a:ea typeface="微软雅黑" panose="020B0503020204020204" pitchFamily="34" charset="-122"/>
+              </a:rPr>
+              <a:t>小美   </a:t>
+            </a:r>
+            <a:r>
+              <a:rPr lang="en-US" altLang="zh-CN" sz="1000" dirty="0" smtClean="0">
+                <a:latin typeface="微软雅黑" panose="020B0503020204020204" pitchFamily="34" charset="-122"/>
+                <a:ea typeface="微软雅黑" panose="020B0503020204020204" pitchFamily="34" charset="-122"/>
+              </a:rPr>
+              <a:t>–</a:t>
+            </a:r>
+            <a:r>
+              <a:rPr lang="zh-CN" altLang="en-US" sz="1000" dirty="0" smtClean="0">
+                <a:latin typeface="微软雅黑" panose="020B0503020204020204" pitchFamily="34" charset="-122"/>
+                <a:ea typeface="微软雅黑" panose="020B0503020204020204" pitchFamily="34" charset="-122"/>
+              </a:rPr>
+              <a:t>宋佳饰演</a:t>
+            </a:r>
+            <a:endParaRPr lang="zh-CN" altLang="en-US" sz="1000" dirty="0">
+              <a:latin typeface="微软雅黑" panose="020B0503020204020204" pitchFamily="34" charset="-122"/>
+              <a:ea typeface="微软雅黑" panose="020B0503020204020204" pitchFamily="34" charset="-122"/>
+            </a:endParaRPr>
+          </a:p>
+        </p:txBody>
+      </p:sp>
+      <p:pic>
+        <p:nvPicPr>
+          <p:cNvPr id="14" name="Picture 3"/>
+          <p:cNvPicPr>
+            <a:picLocks noChangeAspect="1" noChangeArrowheads="1"/>
+          </p:cNvPicPr>
+          <p:nvPr/>
+        </p:nvPicPr>
+        <p:blipFill>
+          <a:blip r:embed="rId25" cstate="print">
+            <a:extLst>
+              <a:ext uri="{28A0092B-C50C-407E-A947-70E740481C1C}">
+                <a14:useLocalDpi xmlns:a14="http://schemas.microsoft.com/office/drawing/2010/main" val="0"/>
+              </a:ext>
+            </a:extLst>
+          </a:blip>
+          <a:srcRect/>
+          <a:stretch>
+            <a:fillRect/>
+          </a:stretch>
+        </p:blipFill>
+        <p:spPr bwMode="auto">
+          <a:xfrm>
+            <a:off x="7479208" y="4472321"/>
+            <a:ext cx="1401129" cy="902327"/>
+          </a:xfrm>
+          <a:prstGeom prst="rect">
+            <a:avLst/>
+          </a:prstGeom>
+          <a:noFill/>
+          <a:ln>
+            <a:noFill/>
+          </a:ln>
+          <a:effectLst/>
+          <a:extLst>
+            <a:ext uri="{909E8E84-426E-40DD-AFC4-6F175D3DCCD1}">
+              <a14:hiddenFill xmlns:a14="http://schemas.microsoft.com/office/drawing/2010/main">
+                <a:solidFill>
+                  <a:schemeClr val="accent1"/>
+                </a:solidFill>
+              </a14:hiddenFill>
+            </a:ext>
+            <a:ext uri="{91240B29-F687-4F45-9708-019B960494DF}">
+              <a14:hiddenLine xmlns:a14="http://schemas.microsoft.com/office/drawing/2010/main" w="9525">
+                <a:solidFill>
+                  <a:schemeClr val="tx1"/>
+                </a:solidFill>
+                <a:miter lim="800000"/>
+                <a:headEnd/>
+                <a:tailEnd/>
+              </a14:hiddenLine>
+            </a:ext>
+            <a:ext uri="{AF507438-7753-43E0-B8FC-AC1667EBCBE1}">
+              <a14:hiddenEffects xmlns:a14="http://schemas.microsoft.com/office/drawing/2010/main">
+                <a:effectLst>
+                  <a:outerShdw dist="35921" dir="2700000" algn="ctr" rotWithShape="0">
+                    <a:schemeClr val="bg2"/>
+                  </a:outerShdw>
+                </a:effectLst>
+              </a14:hiddenEffects>
             </a:ext>
           </a:extLst>
         </p:spPr>

--- a/actors.pptx
+++ b/actors.pptx
@@ -5487,7 +5487,7 @@
         </p:blipFill>
         <p:spPr bwMode="auto">
           <a:xfrm>
-            <a:off x="4024779" y="2770844"/>
+            <a:off x="4024779" y="2783544"/>
             <a:ext cx="1026314" cy="769737"/>
           </a:xfrm>
           <a:prstGeom prst="rect">
@@ -5605,8 +5605,8 @@
         </p:blipFill>
         <p:spPr bwMode="auto">
           <a:xfrm>
-            <a:off x="3942826" y="3801078"/>
-            <a:ext cx="1190220" cy="638758"/>
+            <a:off x="3840805" y="3794120"/>
+            <a:ext cx="1394260" cy="748261"/>
           </a:xfrm>
           <a:prstGeom prst="rect">
             <a:avLst/>
@@ -6094,8 +6094,8 @@
         </p:blipFill>
         <p:spPr bwMode="auto">
           <a:xfrm>
-            <a:off x="5794146" y="1693450"/>
-            <a:ext cx="1115521" cy="718396"/>
+            <a:off x="5758444" y="1699979"/>
+            <a:ext cx="1259404" cy="811057"/>
           </a:xfrm>
           <a:prstGeom prst="rect">
             <a:avLst/>
